--- a/curso_es/pptx/S43.pptx
+++ b/curso_es/pptx/S43.pptx
@@ -4212,7 +4212,7 @@
                 </a:solidFill>
                 <a:latin typeface="Nunito Sans"/>
               </a:rPr>
-              <a:t>Chen tiene miedo a los tiburones cuando se baña en el mar. En cambio, cruza la calle mirando el móvil sin preocuparse.</a:t>
+              <a:t>Un chico tiene miedo a los tiburones cuando se baña en el mar. En cambio, cruza la calle mirando el móvil sin preocuparse.</a:t>
             </a:r>
           </a:p>
         </p:txBody>
@@ -4539,7 +4539,7 @@
                 </a:solidFill>
                 <a:latin typeface="Nunito Sans"/>
               </a:rPr>
-              <a:t>Omar ve nubes negras sobre Bilbao y coge el paraguas. No ha mirado el tiempo en el móvil ni lo ha pensado despacio.</a:t>
+              <a:t>Un chico ve nubes negras sobre Bilbao y coge el paraguas. No ha mirado el tiempo en el móvil ni lo ha pensado despacio.</a:t>
             </a:r>
           </a:p>
         </p:txBody>
